--- a/demo_session/deck_gauges_short_baseline.pptx
+++ b/demo_session/deck_gauges_short_baseline.pptx
@@ -3974,8 +3974,8 @@
         </p:blipFill>
         <p:spPr>
           <a:xfrm>
-            <a:off x="5696712" y="1133856"/>
-            <a:ext cx="6144768" cy="1225296"/>
+            <a:off x="4800600" y="1060704"/>
+            <a:ext cx="7287768" cy="1453896"/>
           </a:xfrm>
           <a:prstGeom prst="rect">
             <a:avLst/>
@@ -3990,8 +3990,8 @@
         </p:nvSpPr>
         <p:spPr>
           <a:xfrm>
-            <a:off x="411480" y="1179576"/>
-            <a:ext cx="4206240" cy="724408"/>
+            <a:off x="228600" y="1371600"/>
+            <a:ext cx="3886200" cy="724408"/>
           </a:xfrm>
           <a:prstGeom prst="rect">
             <a:avLst/>
@@ -4031,14 +4031,15 @@
         </p:nvPicPr>
         <p:blipFill>
           <a:blip r:embed="rId3"/>
+          <a:srcRect r="2040" t="10160" b="12700"/>
           <a:stretch>
             <a:fillRect/>
           </a:stretch>
         </p:blipFill>
         <p:spPr>
           <a:xfrm>
-            <a:off x="5422392" y="2432304"/>
-            <a:ext cx="6419088" cy="1051560"/>
+            <a:off x="4233672" y="2487168"/>
+            <a:ext cx="7790688" cy="1005840"/>
           </a:xfrm>
           <a:prstGeom prst="rect">
             <a:avLst/>
@@ -4053,8 +4054,8 @@
         </p:nvSpPr>
         <p:spPr>
           <a:xfrm>
-            <a:off x="411480" y="2478024"/>
-            <a:ext cx="4206240" cy="889508"/>
+            <a:off x="228600" y="2578608"/>
+            <a:ext cx="3886200" cy="1054608"/>
           </a:xfrm>
           <a:prstGeom prst="rect">
             <a:avLst/>
@@ -4094,14 +4095,15 @@
         </p:nvPicPr>
         <p:blipFill>
           <a:blip r:embed="rId4"/>
+          <a:srcRect r="2130" t="10080" b="10710"/>
           <a:stretch>
             <a:fillRect/>
           </a:stretch>
         </p:blipFill>
         <p:spPr>
           <a:xfrm>
-            <a:off x="5422392" y="3557016"/>
-            <a:ext cx="6419088" cy="1051560"/>
+            <a:off x="4215384" y="3566160"/>
+            <a:ext cx="7781544" cy="1033271"/>
           </a:xfrm>
           <a:prstGeom prst="rect">
             <a:avLst/>
@@ -4116,8 +4118,8 @@
         </p:nvSpPr>
         <p:spPr>
           <a:xfrm>
-            <a:off x="411480" y="3602736"/>
-            <a:ext cx="4206240" cy="559307"/>
+            <a:off x="182880" y="3794760"/>
+            <a:ext cx="3931920" cy="559307"/>
           </a:xfrm>
           <a:prstGeom prst="rect">
             <a:avLst/>
@@ -4157,14 +4159,15 @@
         </p:nvPicPr>
         <p:blipFill>
           <a:blip r:embed="rId5"/>
+          <a:srcRect r="1580" t="10550" b="11620"/>
           <a:stretch>
             <a:fillRect/>
           </a:stretch>
         </p:blipFill>
         <p:spPr>
           <a:xfrm>
-            <a:off x="5422392" y="4681728"/>
-            <a:ext cx="6419088" cy="1051560"/>
+            <a:off x="4215384" y="4709160"/>
+            <a:ext cx="7827264" cy="1014984"/>
           </a:xfrm>
           <a:prstGeom prst="rect">
             <a:avLst/>
@@ -4179,8 +4182,8 @@
         </p:nvSpPr>
         <p:spPr>
           <a:xfrm>
-            <a:off x="411480" y="4727448"/>
-            <a:ext cx="4206240" cy="724408"/>
+            <a:off x="182880" y="4937760"/>
+            <a:ext cx="3931920" cy="724408"/>
           </a:xfrm>
           <a:prstGeom prst="rect">
             <a:avLst/>
@@ -4218,7 +4221,64 @@
         </p:nvSpPr>
         <p:spPr>
           <a:xfrm>
-            <a:off x="411480" y="5943600"/>
+            <a:off x="411480" y="5788152"/>
+            <a:ext cx="11384280" cy="274320"/>
+          </a:xfrm>
+          <a:prstGeom prst="rect">
+            <a:avLst/>
+          </a:prstGeom>
+          <a:noFill/>
+        </p:spPr>
+        <p:txBody>
+          <a:bodyPr wrap="square">
+            <a:spAutoFit/>
+          </a:bodyPr>
+          <a:lstStyle/>
+          <a:p>
+            <a:pPr>
+              <a:spcAft>
+                <a:spcPts val="600"/>
+              </a:spcAft>
+            </a:pPr>
+            <a:r>
+              <a:rPr sz="1100" b="0">
+                <a:solidFill>
+                  <a:srgbClr val="282828"/>
+                </a:solidFill>
+                <a:latin typeface="Arial"/>
+              </a:rPr>
+              <a:t>•  </a:t>
+            </a:r>
+            <a:r>
+              <a:rPr sz="1100" b="1">
+                <a:solidFill>
+                  <a:srgbClr val="282828"/>
+                </a:solidFill>
+                <a:latin typeface="Arial"/>
+              </a:rPr>
+              <a:t>The stepped Zernike's 4.8 nm is a gain error, not noise:</a:t>
+            </a:r>
+            <a:r>
+              <a:rPr sz="1100" b="0">
+                <a:solidFill>
+                  <a:srgbClr val="282828"/>
+                </a:solidFill>
+                <a:latin typeface="Arial"/>
+              </a:rPr>
+              <a:t> its inversion takes the reference wave's amplitude from the flat, and on the 30 nm surface the focal core that makes it is weaker, so the raw map reads about 16 % low, shaped like the surface; the matrix measured on the surface absorbs it (5 pm calibrated).  The vector pair's two simultaneous frames divide the reference out: 25 pm raw.</a:t>
+            </a:r>
+          </a:p>
+        </p:txBody>
+      </p:sp>
+      <p:sp>
+        <p:nvSpPr>
+          <p:cNvPr id="13" name="TextBox 12"/>
+          <p:cNvSpPr txBox="1"/>
+          <p:nvPr/>
+        </p:nvSpPr>
+        <p:spPr>
+          <a:xfrm>
+            <a:off x="411480" y="6327648"/>
             <a:ext cx="11338560" cy="274320"/>
           </a:xfrm>
           <a:prstGeom prst="rect">
@@ -19155,7 +19215,7 @@
                 </a:solidFill>
                 <a:latin typeface="Arial"/>
               </a:rPr>
-              <a:t> (fourth column) is the core of the focal spot spread back over the pupil: on the working surface it has changed, so the raw four-frame map carries a 4.8 nm bias.  The matrix measured on the surface absorbs it, which is how the stepped reading reaches 5 pm on its rows.</a:t>
+              <a:t> (fourth column) is the core of the focal spot spread back over the pupil, and the inversion takes its amplitude from the flat.  On the 30 nm surface (0.6 rad rms of wavefront phase, double pass) the core is weaker, the recovered phase scales as one over that amplitude, and the raw map reads the surface about 16 % low -- 4.8 nm, shaped like the surface: a gain error, not noise.  The matrix measured on the surface absorbs it, which is how the stepped reading reaches 5 pm on its rows; left as calibrated on the flat, it is what limits the self-referenced sensors' capture range to 36-70 nm.</a:t>
             </a:r>
           </a:p>
         </p:txBody>
@@ -19168,7 +19228,7 @@
         </p:nvSpPr>
         <p:spPr>
           <a:xfrm>
-            <a:off x="411480" y="5016246"/>
+            <a:off x="411480" y="5759196"/>
             <a:ext cx="11368735" cy="274320"/>
           </a:xfrm>
           <a:prstGeom prst="rect">

--- a/demo_session/deck_gauges_short_baseline.pptx
+++ b/demo_session/deck_gauges_short_baseline.pptx
@@ -3974,8 +3974,8 @@
         </p:blipFill>
         <p:spPr>
           <a:xfrm>
-            <a:off x="4800600" y="1060704"/>
-            <a:ext cx="7287768" cy="1453896"/>
+            <a:off x="5212080" y="1060704"/>
+            <a:ext cx="6629400" cy="1225296"/>
           </a:xfrm>
           <a:prstGeom prst="rect">
             <a:avLst/>
@@ -3990,8 +3990,8 @@
         </p:nvSpPr>
         <p:spPr>
           <a:xfrm>
-            <a:off x="228600" y="1371600"/>
-            <a:ext cx="3886200" cy="724408"/>
+            <a:off x="228600" y="1170432"/>
+            <a:ext cx="3931920" cy="724408"/>
           </a:xfrm>
           <a:prstGeom prst="rect">
             <a:avLst/>
@@ -4016,7 +4016,7 @@
                 </a:solidFill>
                 <a:latin typeface="Arial"/>
               </a:rPr>
-              <a:t>Interferometer (hybrid, mirror rig): the command; the test and reference arms at the camera; two of the four phase-stepped frames; the recovered surface; the raw map minus the engine's field, 463 pm (1.5 %).</a:t>
+              <a:t>Interferometer (hybrid): the command; the test and reference arms at the camera; two of the four phase-stepped frames; the recovered surface, 25.8 nm rms; the raw map minus the engine's field, 463 pm, gain 0.987.</a:t>
             </a:r>
           </a:p>
         </p:txBody>
@@ -4031,15 +4031,14 @@
         </p:nvPicPr>
         <p:blipFill>
           <a:blip r:embed="rId3"/>
-          <a:srcRect r="2040" t="10160" b="12700"/>
           <a:stretch>
             <a:fillRect/>
           </a:stretch>
         </p:blipFill>
         <p:spPr>
           <a:xfrm>
-            <a:off x="4233672" y="2487168"/>
-            <a:ext cx="7790688" cy="1005840"/>
+            <a:off x="5212080" y="2340864"/>
+            <a:ext cx="6629400" cy="1161288"/>
           </a:xfrm>
           <a:prstGeom prst="rect">
             <a:avLst/>
@@ -4054,8 +4053,8 @@
         </p:nvSpPr>
         <p:spPr>
           <a:xfrm>
-            <a:off x="228600" y="2578608"/>
-            <a:ext cx="3886200" cy="1054608"/>
+            <a:off x="228600" y="2450592"/>
+            <a:ext cx="3931920" cy="889508"/>
           </a:xfrm>
           <a:prstGeom prst="rect">
             <a:avLst/>
@@ -4080,7 +4079,7 @@
                 </a:solidFill>
                 <a:latin typeface="Arial"/>
               </a:rPr>
-              <a:t>Stepped Zernike: the focal spot with the dimple's footprint; the dimple's phase; the reference wave the dimple makes from the beam; the clear frame and the first depth frame; the recovered surface; raw map minus the engine, 4.8 nm (the beam-made reference, which the matrix measured on the surface absorbs).</a:t>
+              <a:t>Stepped Zernike: the focal spot with the dimple's footprint; the dimple's phase; the reference wave the dimple makes from the beam; the clear frame and the first depth frame; the recovered surface, 24.6 nm rms; raw map minus the engine 7.1 nm, gain 0.78.</a:t>
             </a:r>
           </a:p>
         </p:txBody>
@@ -4095,15 +4094,14 @@
         </p:nvPicPr>
         <p:blipFill>
           <a:blip r:embed="rId4"/>
-          <a:srcRect r="2130" t="10080" b="10710"/>
           <a:stretch>
             <a:fillRect/>
           </a:stretch>
         </p:blipFill>
         <p:spPr>
           <a:xfrm>
-            <a:off x="4215384" y="3566160"/>
-            <a:ext cx="7781544" cy="1033271"/>
+            <a:off x="5212080" y="3557016"/>
+            <a:ext cx="6629400" cy="1143000"/>
           </a:xfrm>
           <a:prstGeom prst="rect">
             <a:avLst/>
@@ -4118,8 +4116,8 @@
         </p:nvSpPr>
         <p:spPr>
           <a:xfrm>
-            <a:off x="182880" y="3794760"/>
-            <a:ext cx="3931920" cy="559307"/>
+            <a:off x="182880" y="3666744"/>
+            <a:ext cx="3977639" cy="724408"/>
           </a:xfrm>
           <a:prstGeom prst="rect">
             <a:avLst/>
@@ -4144,7 +4142,7 @@
                 </a:solidFill>
                 <a:latin typeface="Arial"/>
               </a:rPr>
-              <a:t>Vector Zernike: the metasurface (+90° on one circular state, −90° on the other); camera A and camera B, both frames at once; the pixel-by-pixel solve; raw map minus the engine, 25 pm.</a:t>
+              <a:t>Vector Zernike: the metasurface (+90° on one circular state, −90° on the other); camera A and camera B, both frames at once; the pixel-by-pixel solve, 31.1 nm rms; raw map minus the engine 863 pm, gain 0.993 (200 pm of it on the flat: the arm term).</a:t>
             </a:r>
           </a:p>
         </p:txBody>
@@ -4159,15 +4157,14 @@
         </p:nvPicPr>
         <p:blipFill>
           <a:blip r:embed="rId5"/>
-          <a:srcRect r="1580" t="10550" b="11620"/>
           <a:stretch>
             <a:fillRect/>
           </a:stretch>
         </p:blipFill>
         <p:spPr>
           <a:xfrm>
-            <a:off x="4215384" y="4709160"/>
-            <a:ext cx="7827264" cy="1014984"/>
+            <a:off x="5212080" y="4754880"/>
+            <a:ext cx="6629400" cy="1143000"/>
           </a:xfrm>
           <a:prstGeom prst="rect">
             <a:avLst/>
@@ -4182,8 +4179,8 @@
         </p:nvSpPr>
         <p:spPr>
           <a:xfrm>
-            <a:off x="182880" y="4937760"/>
-            <a:ext cx="3931920" cy="724408"/>
+            <a:off x="182880" y="4864608"/>
+            <a:ext cx="3977639" cy="724408"/>
           </a:xfrm>
           <a:prstGeom prst="rect">
             <a:avLst/>
@@ -4208,7 +4205,7 @@
                 </a:solidFill>
                 <a:latin typeface="Arial"/>
               </a:rPr>
-              <a:t>Stepped pinhole: the pinhole plate (clear pinhole, the surround at 0.72); the first step frame and the shutter frame (the pinhole's light alone); the recovered surface; raw map minus the engine, 184 pm.</a:t>
+              <a:t>Stepped pinhole: the pinhole plate (clear pinhole, the surround at 0.72); the first step frame and the shutter frame (the pinhole's light alone); the recovered surface, 30.7 nm rms; raw map minus the engine 730 pm, gain 0.981.</a:t>
             </a:r>
           </a:p>
         </p:txBody>
@@ -4221,7 +4218,7 @@
         </p:nvSpPr>
         <p:spPr>
           <a:xfrm>
-            <a:off x="411480" y="5788152"/>
+            <a:off x="411480" y="5998464"/>
             <a:ext cx="11384280" cy="274320"/>
           </a:xfrm>
           <a:prstGeom prst="rect">
@@ -4241,7 +4238,7 @@
               </a:spcAft>
             </a:pPr>
             <a:r>
-              <a:rPr sz="1100" b="0">
+              <a:rPr sz="1000" b="0">
                 <a:solidFill>
                   <a:srgbClr val="282828"/>
                 </a:solidFill>
@@ -4250,22 +4247,22 @@
               <a:t>•  </a:t>
             </a:r>
             <a:r>
-              <a:rPr sz="1100" b="1">
+              <a:rPr sz="1000" b="1">
                 <a:solidFill>
                   <a:srgbClr val="282828"/>
                 </a:solidFill>
                 <a:latin typeface="Arial"/>
               </a:rPr>
-              <a:t>The stepped Zernike's 4.8 nm is a gain error, not noise:</a:t>
-            </a:r>
-            <a:r>
-              <a:rPr sz="1100" b="0">
+              <a:t>The stepped Zernike's 7.1 nm is a gain error, not noise:</a:t>
+            </a:r>
+            <a:r>
+              <a:rPr sz="1000" b="0">
                 <a:solidFill>
                   <a:srgbClr val="282828"/>
                 </a:solidFill>
                 <a:latin typeface="Arial"/>
               </a:rPr>
-              <a:t> its inversion takes the reference wave's amplitude from the flat, and on the 30 nm surface the focal core that makes it is weaker, so the raw map reads about 16 % low, shaped like the surface; the matrix measured on the surface absorbs it (5 pm calibrated).  The vector pair's two simultaneous frames divide the reference out: 25 pm raw.</a:t>
+              <a:t> its inversion takes the reference wave's amplitude from the flat; on the 30 nm surface the focal core is weaker, so the raw map reads 22 % low (gain 0.78), shaped like the surface, and the matrix measured on the surface absorbs it (5 pm calibrated).  The vector pair's two simultaneous frames need no amplitude from the flat: gain 0.993.</a:t>
             </a:r>
           </a:p>
         </p:txBody>
@@ -4278,8 +4275,8 @@
         </p:nvSpPr>
         <p:spPr>
           <a:xfrm>
-            <a:off x="411480" y="6327648"/>
-            <a:ext cx="11338560" cy="274320"/>
+            <a:off x="411480" y="6455664"/>
+            <a:ext cx="11384280" cy="274320"/>
           </a:xfrm>
           <a:prstGeom prst="rect">
             <a:avLst/>
@@ -4304,7 +4301,7 @@
                 </a:solidFill>
                 <a:latin typeface="Arial"/>
               </a:rPr>
-              <a:t>Row 2 of each gauge's station-by-station figure (the full figures, with the flat mirror as row 1, are in the backup).  Run tags redo96_oapstn (interferometer) and stations193 (the three sensors, 193 pixels per pupil).</a:t>
+              <a:t>Row 2 of each station figure, mirror rig, the same DM command in all four (30 nm rms over the lattice, seed 7); the full figures are in the backup.  The interferometer's camera sees 25.8 nm rms of it, the sensors' 31: the detector legs image the pupil differently (the pupil-image slide), and each matrix is measured through its own train.  Runs redo96_oapstn2, stations193_oap.</a:t>
             </a:r>
           </a:p>
         </p:txBody>
@@ -17074,7 +17071,7 @@
       </p:sp>
       <p:pic>
         <p:nvPicPr>
-          <p:cNvPr id="4" name="Picture 3" descr="redo96_oapstn_stations.png"/>
+          <p:cNvPr id="4" name="Picture 3" descr="redo96_oapstn2_stations.png"/>
           <p:cNvPicPr>
             <a:picLocks noChangeAspect="1"/>
           </p:cNvPicPr>
@@ -17088,8 +17085,8 @@
         </p:blipFill>
         <p:spPr>
           <a:xfrm>
-            <a:off x="2028583" y="1298448"/>
-            <a:ext cx="8134528" cy="2531872"/>
+            <a:off x="1713761" y="1298448"/>
+            <a:ext cx="8764172" cy="2531872"/>
           </a:xfrm>
           <a:prstGeom prst="rect">
             <a:avLst/>
@@ -17226,7 +17223,7 @@
                 </a:solidFill>
                 <a:latin typeface="Arial"/>
               </a:rPr>
-              <a:t>Run tag redo96_oapstn (the mirror rig).  The lens rig's figure exists but its absolute residual reads 51 nm against the engine — a fold of the phase, not an imaging error (its differential rows read the same as the mirror rig's); under investigation, so it is not shown.</a:t>
+              <a:t>Run tag redo96_oapstn2 (the mirror rig; the DM's full-lattice 30 nm command, seed 7, the same surface in every station figure).  The lens rig's figure exists but its absolute residual reads 51 nm against the engine — a fold of the phase, not an imaging error (its differential rows read the same as the mirror rig's); under investigation, so it is not shown.</a:t>
             </a:r>
           </a:p>
         </p:txBody>
@@ -19051,7 +19048,7 @@
                 </a:solidFill>
                 <a:latin typeface="Arial"/>
               </a:rPr>
-              <a:t>The key signals along the train for the flat mirror and for the 30 nm working surface: the raw pixel map on the working surface is off by 4.8 nm because the sensor's reference is made from the beam, which is why the response matrix is measured on the surface</a:t>
+              <a:t>The key signals along the train for the flat mirror and for the 30 nm working surface: the raw pixel map reads the surface 22 % low (7.1 nm rms, gain 0.78) because the sensor's reference is made from the beam, which is why the response matrix is measured on the surface</a:t>
             </a:r>
           </a:p>
         </p:txBody>
@@ -19102,7 +19099,7 @@
       </p:sp>
       <p:pic>
         <p:nvPicPr>
-          <p:cNvPr id="4" name="Picture 3" descr="stations193_stations_S.png"/>
+          <p:cNvPr id="4" name="Picture 3" descr="stations193_oap_stations_S.png"/>
           <p:cNvPicPr>
             <a:picLocks noChangeAspect="1"/>
           </p:cNvPicPr>
@@ -19116,8 +19113,8 @@
         </p:blipFill>
         <p:spPr>
           <a:xfrm>
-            <a:off x="2167487" y="1298448"/>
-            <a:ext cx="7856720" cy="2183892"/>
+            <a:off x="2493141" y="1298448"/>
+            <a:ext cx="7205411" cy="2018792"/>
           </a:xfrm>
           <a:prstGeom prst="rect">
             <a:avLst/>
@@ -19132,8 +19129,8 @@
         </p:nvSpPr>
         <p:spPr>
           <a:xfrm>
-            <a:off x="411480" y="3500628"/>
-            <a:ext cx="11368735" cy="559307"/>
+            <a:off x="411480" y="3335528"/>
+            <a:ext cx="11368735" cy="724408"/>
           </a:xfrm>
           <a:prstGeom prst="rect">
             <a:avLst/>
@@ -19158,7 +19155,7 @@
                 </a:solidFill>
                 <a:latin typeface="Arial"/>
               </a:rPr>
-              <a:t>Row 1 the flat mirror, row 2 the 30 nm working surface.  Left to right: the mirror command; the focal spot at the mask (log scale) with the dimple's footprint; the dimple's phase; the reference wave the dimple makes at the detector; the clear frame and the first depth frame of the four; the surface recovered from the four frames; the raw map minus the engine's own field at the detector (0 on the flat, 4.8 nm rms on the working surface).  The runner's own figure, run stations193 at 193 pixels per pupil.</a:t>
+              <a:t>Row 1 the flat mirror, row 2 the 30 nm working surface.  Left to right: the mirror command; the focal spot at the mask (log scale) with the dimple's footprint; the dimple's phase; the reference wave the dimple makes at the detector; the clear frame and the first depth frame of the four; the surface recovered from the four frames; the raw map minus the engine's own field at the detector (0 on the flat, 7.1 nm rms on the working surface, gain 0.78).  The runner's own figure, run stations193_oap on the mirror rig at 193 pixels per pupil.</a:t>
             </a:r>
           </a:p>
         </p:txBody>
@@ -19171,7 +19168,7 @@
         </p:nvSpPr>
         <p:spPr>
           <a:xfrm>
-            <a:off x="411480" y="4096512"/>
+            <a:off x="411480" y="4096511"/>
             <a:ext cx="11368735" cy="274320"/>
           </a:xfrm>
           <a:prstGeom prst="rect">
@@ -19215,7 +19212,7 @@
                 </a:solidFill>
                 <a:latin typeface="Arial"/>
               </a:rPr>
-              <a:t> (fourth column) is the core of the focal spot spread back over the pupil, and the inversion takes its amplitude from the flat.  On the 30 nm surface (0.6 rad rms of wavefront phase, double pass) the core is weaker, the recovered phase scales as one over that amplitude, and the raw map reads the surface about 16 % low -- 4.8 nm, shaped like the surface: a gain error, not noise.  The matrix measured on the surface absorbs it, which is how the stepped reading reaches 5 pm on its rows; left as calibrated on the flat, it is what limits the self-referenced sensors' capture range to 36-70 nm.</a:t>
+              <a:t> (fourth column) is the core of the focal spot spread back over the pupil, and the inversion takes its amplitude from the flat.  On the 30 nm surface (0.6 rad rms of wavefront phase, double pass) the core is weaker, the recovered phase scales as one over that amplitude, and the raw map reads the surface 22 % low -- gain 0.78, 7.1 nm rms, shaped like the surface: a gain error, not noise.  The matrix measured on the surface absorbs it, which is how the stepped reading reaches 5 pm on its rows; left as calibrated on the flat, it is what limits the self-referenced sensors' capture range to 36-70 nm.</a:t>
             </a:r>
           </a:p>
         </p:txBody>
@@ -19603,7 +19600,7 @@
                 </a:solidFill>
                 <a:latin typeface="Arial"/>
               </a:rPr>
-              <a:t>The two images taken at once, and a raw map within 25 pm of the engine's field on the 30 nm working surface: the pixel-by-pixel solve needs no calibration to read the surface</a:t>
+              <a:t>The two images taken at once, and a raw map at gain 0.993 against the engine's field on the 30 nm working surface: the pixel-by-pixel solve needs no reference amplitude from the flat; what remains (863 pm, 200 of them already on the flat) is the mirror rig's arm term</a:t>
             </a:r>
           </a:p>
         </p:txBody>
@@ -19654,7 +19651,7 @@
       </p:sp>
       <p:pic>
         <p:nvPicPr>
-          <p:cNvPr id="4" name="Picture 3" descr="stations193_stations_V.png"/>
+          <p:cNvPr id="4" name="Picture 3" descr="stations193_oap_stations_V.png"/>
           <p:cNvPicPr>
             <a:picLocks noChangeAspect="1"/>
           </p:cNvPicPr>
@@ -19668,8 +19665,8 @@
         </p:blipFill>
         <p:spPr>
           <a:xfrm>
-            <a:off x="2167487" y="1298448"/>
-            <a:ext cx="7856720" cy="2183892"/>
+            <a:off x="2198506" y="1298448"/>
+            <a:ext cx="7794681" cy="2183892"/>
           </a:xfrm>
           <a:prstGeom prst="rect">
             <a:avLst/>
@@ -19806,7 +19803,7 @@
                 </a:solidFill>
                 <a:latin typeface="Arial"/>
               </a:rPr>
-              <a:t>The 25 pm is the raw absolute map's error on a 30 nm surface with the flat's calibration; on the same surface the calibrated reading is 0.9935 / 4 pm.</a:t>
+              <a:t>The 863 pm is the raw absolute map's error on the 30 nm surface with the flat's calibration, at gain 0.993; 200 pm of it is there on the flat too -- the mirror rig's uncalibrated metasurface-arm term, which the calibration absorbs.  On the same surface the calibrated reading is 0.9935 / 4 pm.  Run stations193_oap.</a:t>
             </a:r>
           </a:p>
         </p:txBody>
@@ -20098,7 +20095,7 @@
                 </a:solidFill>
                 <a:latin typeface="Arial"/>
               </a:rPr>
-              <a:t>The pinhole passes the core as the reference, the attenuated surround passes the rest; the first step frame and the shutter frame; a raw map within 0.18 nm of the engine's field on the working surface</a:t>
+              <a:t>The pinhole passes the core as the reference, the attenuated surround passes the rest; the first step frame and the shutter frame; a raw map at gain 0.981, 0.73 nm rms against the engine's field on the working surface</a:t>
             </a:r>
           </a:p>
         </p:txBody>
@@ -20149,7 +20146,7 @@
       </p:sp>
       <p:pic>
         <p:nvPicPr>
-          <p:cNvPr id="4" name="Picture 3" descr="stations193_stations_P.png"/>
+          <p:cNvPr id="4" name="Picture 3" descr="stations193_oap_stations_P.png"/>
           <p:cNvPicPr>
             <a:picLocks noChangeAspect="1"/>
           </p:cNvPicPr>
@@ -20163,8 +20160,8 @@
         </p:blipFill>
         <p:spPr>
           <a:xfrm>
-            <a:off x="2162193" y="1298448"/>
-            <a:ext cx="7867309" cy="2183892"/>
+            <a:off x="2198506" y="1298448"/>
+            <a:ext cx="7794681" cy="2183892"/>
           </a:xfrm>
           <a:prstGeom prst="rect">
             <a:avLst/>
@@ -20301,7 +20298,7 @@
                 </a:solidFill>
                 <a:latin typeface="Arial"/>
               </a:rPr>
-              <a:t>The 0.18 nm is the raw map's error with the flat's calibration; through the matrix on the surface the pinhole reads 0.9935 / 4 pm, the same as the vector dimple.</a:t>
+              <a:t>The 0.73 nm (gain 0.981) is the raw map's error with the flat's calibration, run stations193_oap on the mirror rig; through the matrix on the surface the pinhole reads 0.9935 / 4 pm, the same as the vector dimple.</a:t>
             </a:r>
           </a:p>
         </p:txBody>
@@ -35622,7 +35619,7 @@
                 </a:solidFill>
                 <a:latin typeface="Arial"/>
               </a:rPr>
-              <a:t> (tg_psi_dm96_oap/runs): lens_deck, lens_deck_se2, lens_deck_se5, loop_lens, loop_lens_cam, loop_lens_intra, loop_lens_se2, descent_lens, oap_deck, loop_oap, descent_oap, oap_bareAl, oap_coat, oap_jones, zoap (the 7° rigs); lens22, lens22g, lens22h, node22t, fold1-4, loss, loss_src, loss_a2, conj, zseat, zseat2, oap22d, oapdraw3, oap22d_tail, tailA, tailB, oapifo2, oapifol2, oapdesc2, oapuw2, lensuw2, thk22, sub22, aoi_lens22, aoi_oap22, gate3_win, gate3_lens, wrapoap, wraplens, stnoap, stnlens, pupilq_lens, pupilq_oap (the 22.5° bench and the redesigned reflective rig); pdi_dm96/runs/psriclear2 (the P/SRI bench through the clearance tool).  Reports REPORT_gauge_ifo.md (CCMac) with REPORT_oap.md, REPORT_bench_realism.md and REPORT_reflective.md (TO), and README.md.</a:t>
+              <a:t> (tg_psi_dm96_oap/runs): lens_deck, lens_deck_se2, lens_deck_se5, loop_lens, loop_lens_cam, loop_lens_intra, loop_lens_se2, descent_lens, oap_deck, loop_oap, descent_oap, oap_bareAl, oap_coat, oap_jones, zoap (the 7° rigs); lens22, lens22g, lens22h, node22t, fold1-4, loss, loss_src, loss_a2, conj, zseat, zseat2, oap22d, oapdraw3, oap22d_tail, tailA, tailB, oapifo2, oapifol2, oapdesc2, oapuw2, lensuw2, thk22, sub22, aoi_lens22, aoi_oap22, gate3_win, gate3_lens, wrapoap, wraplens, stnoap, stnlens, pupilq_lens, pupilq_oap (the 22.5° bench and the redesigned reflective rig); pdi_dm96/runs/psriclear2 (the P/SRI bench through the clearance tool).  Reports REPORT_gauge_ifo.md (CCMac) with REPORT_oap.md, REPORT_bench_realism.md and REPORT_reflective.md (TO), and README.md, redo96_oapstn2.</a:t>
             </a:r>
           </a:p>
           <a:p>
@@ -35656,7 +35653,7 @@
                 </a:solidFill>
                 <a:latin typeface="Arial"/>
               </a:rPr>
-              <a:t> (zwfs_dm96/runs): matbase, matbase385, m2048, m2048_lat, cap385, cap385_b60-b160, noise193_b30-b160, rec193full, loop193, loop385, v193base, v193noise, vloop193, fold_diag, v2g, v2loop, v3arm, v3s, v3loop, an193_ref/cube/q300/q100/az1/bound/clear, stations193, gate22_193, sub22, thk22 (the 22.5° bench with substrates and thicknesses), oapsens22, oapsens22n, vqw22, vmap22, oaploop22, oapnoise22 (the sensors on the redesigned mirror rig).  README.md (CCL) and deck_zwfs.md.</a:t>
+              <a:t> (zwfs_dm96/runs): matbase, matbase385, m2048, m2048_lat, cap385, cap385_b60-b160, noise193_b30-b160, rec193full, loop193, loop385, v193base, v193noise, vloop193, fold_diag, v2g, v2loop, v3arm, v3s, v3loop, an193_ref/cube/q300/q100/az1/bound/clear, stations193, gate22_193, sub22, thk22 (the 22.5° bench with substrates and thicknesses), oapsens22, oapsens22n, vqw22, vmap22, oaploop22, oapnoise22 (the sensors on the redesigned mirror rig).  README.md (CCL) and deck_zwfs.md, stations193_oap.</a:t>
             </a:r>
           </a:p>
           <a:p>

--- a/demo_session/deck_gauges_short_baseline.pptx
+++ b/demo_session/deck_gauges_short_baseline.pptx
@@ -11337,7 +11337,7 @@
         </p:nvGraphicFramePr>
         <p:xfrm>
           <a:off x="411480" y="1298448"/>
-          <a:ext cx="11368734" cy="1960245"/>
+          <a:ext cx="11368733" cy="2806065"/>
         </p:xfrm>
         <a:graphic>
           <a:graphicData uri="http://schemas.openxmlformats.org/drawingml/2006/table">
@@ -11346,12 +11346,12 @@
                 <a:tableStyleId>{5C22544A-7EE6-4342-B048-85BDC9FD1C3A}</a:tableStyleId>
               </a:tblPr>
               <a:tblGrid>
-                <a:gridCol w="2884116"/>
-                <a:gridCol w="6157978"/>
-                <a:gridCol w="1163320"/>
-                <a:gridCol w="1163320"/>
+                <a:gridCol w="1951109"/>
+                <a:gridCol w="5642398"/>
+                <a:gridCol w="1740178"/>
+                <a:gridCol w="2035048"/>
               </a:tblGrid>
-              <a:tr h="280035">
+              <a:tr h="468630">
                 <a:tc>
                   <a:txBody>
                     <a:bodyPr wrap="square"/>
@@ -11437,6 +11437,176 @@
                   <a:tcPr marL="54864" marR="54864" marT="18288" marB="18288">
                     <a:solidFill>
                       <a:srgbClr val="1F4E79"/>
+                    </a:solidFill>
+                  </a:tcPr>
+                </a:tc>
+              </a:tr>
+              <a:tr h="468630">
+                <a:tc>
+                  <a:txBody>
+                    <a:bodyPr wrap="square"/>
+                    <a:lstStyle/>
+                    <a:p>
+                      <a:r>
+                        <a:rPr sz="1100" b="0">
+                          <a:solidFill>
+                            <a:srgbClr val="282828"/>
+                          </a:solidFill>
+                          <a:latin typeface="Arial"/>
+                        </a:rPr>
+                        <a:t>accuracy</a:t>
+                      </a:r>
+                    </a:p>
+                  </a:txBody>
+                  <a:tcPr marL="54864" marR="54864" marT="18288" marB="18288">
+                    <a:solidFill>
+                      <a:srgbClr val="FFFFFF"/>
+                    </a:solidFill>
+                  </a:tcPr>
+                </a:tc>
+                <a:tc>
+                  <a:txBody>
+                    <a:bodyPr wrap="square"/>
+                    <a:lstStyle/>
+                    <a:p>
+                      <a:r>
+                        <a:rPr sz="1100" b="0">
+                          <a:solidFill>
+                            <a:srgbClr val="282828"/>
+                          </a:solidFill>
+                          <a:latin typeface="Arial"/>
+                        </a:rPr>
+                        <a:t>a 10 nm change on one actuator, read through the matrix measured on the 30 nm surface: gain (error) / floor</a:t>
+                      </a:r>
+                    </a:p>
+                  </a:txBody>
+                  <a:tcPr marL="54864" marR="54864" marT="18288" marB="18288">
+                    <a:solidFill>
+                      <a:srgbClr val="FFFFFF"/>
+                    </a:solidFill>
+                  </a:tcPr>
+                </a:tc>
+                <a:tc>
+                  <a:txBody>
+                    <a:bodyPr wrap="square"/>
+                    <a:lstStyle/>
+                    <a:p>
+                      <a:r>
+                        <a:rPr sz="1100" b="0">
+                          <a:solidFill>
+                            <a:srgbClr val="282828"/>
+                          </a:solidFill>
+                          <a:latin typeface="Arial"/>
+                        </a:rPr>
+                        <a:t>1.004 (0.4 %) / 1.4 pm</a:t>
+                      </a:r>
+                    </a:p>
+                  </a:txBody>
+                  <a:tcPr marL="54864" marR="54864" marT="18288" marB="18288">
+                    <a:solidFill>
+                      <a:srgbClr val="FFFFFF"/>
+                    </a:solidFill>
+                  </a:tcPr>
+                </a:tc>
+                <a:tc>
+                  <a:txBody>
+                    <a:bodyPr wrap="square"/>
+                    <a:lstStyle/>
+                    <a:p>
+                      <a:r>
+                        <a:rPr sz="1100" b="0">
+                          <a:solidFill>
+                            <a:srgbClr val="282828"/>
+                          </a:solidFill>
+                          <a:latin typeface="Arial"/>
+                        </a:rPr>
+                        <a:t>0.986 (1.4 %) / 2.3 pm</a:t>
+                      </a:r>
+                    </a:p>
+                  </a:txBody>
+                  <a:tcPr marL="54864" marR="54864" marT="18288" marB="18288">
+                    <a:solidFill>
+                      <a:srgbClr val="FFFFFF"/>
+                    </a:solidFill>
+                  </a:tcPr>
+                </a:tc>
+              </a:tr>
+              <a:tr h="468630">
+                <a:tc>
+                  <a:txBody>
+                    <a:bodyPr wrap="square"/>
+                    <a:lstStyle/>
+                    <a:p/>
+                  </a:txBody>
+                  <a:tcPr marL="54864" marR="54864" marT="18288" marB="18288">
+                    <a:solidFill>
+                      <a:srgbClr val="ECF1F6"/>
+                    </a:solidFill>
+                  </a:tcPr>
+                </a:tc>
+                <a:tc>
+                  <a:txBody>
+                    <a:bodyPr wrap="square"/>
+                    <a:lstStyle/>
+                    <a:p>
+                      <a:r>
+                        <a:rPr sz="1100" b="0">
+                          <a:solidFill>
+                            <a:srgbClr val="282828"/>
+                          </a:solidFill>
+                          <a:latin typeface="Arial"/>
+                        </a:rPr>
+                        <a:t>the raw map of the 30 nm surface against the engine's field at the camera, before any calibration</a:t>
+                      </a:r>
+                    </a:p>
+                  </a:txBody>
+                  <a:tcPr marL="54864" marR="54864" marT="18288" marB="18288">
+                    <a:solidFill>
+                      <a:srgbClr val="ECF1F6"/>
+                    </a:solidFill>
+                  </a:tcPr>
+                </a:tc>
+                <a:tc>
+                  <a:txBody>
+                    <a:bodyPr wrap="square"/>
+                    <a:lstStyle/>
+                    <a:p>
+                      <a:r>
+                        <a:rPr sz="1100" b="0">
+                          <a:solidFill>
+                            <a:srgbClr val="282828"/>
+                          </a:solidFill>
+                          <a:latin typeface="Arial"/>
+                        </a:rPr>
+                        <a:t>not scored (a phase fold; backup)</a:t>
+                      </a:r>
+                    </a:p>
+                  </a:txBody>
+                  <a:tcPr marL="54864" marR="54864" marT="18288" marB="18288">
+                    <a:solidFill>
+                      <a:srgbClr val="ECF1F6"/>
+                    </a:solidFill>
+                  </a:tcPr>
+                </a:tc>
+                <a:tc>
+                  <a:txBody>
+                    <a:bodyPr wrap="square"/>
+                    <a:lstStyle/>
+                    <a:p>
+                      <a:r>
+                        <a:rPr sz="1100" b="0">
+                          <a:solidFill>
+                            <a:srgbClr val="282828"/>
+                          </a:solidFill>
+                          <a:latin typeface="Arial"/>
+                        </a:rPr>
+                        <a:t>1.5 % (463 pm), gain 0.987</a:t>
+                      </a:r>
+                    </a:p>
+                  </a:txBody>
+                  <a:tcPr marL="54864" marR="54864" marT="18288" marB="18288">
+                    <a:solidFill>
+                      <a:srgbClr val="ECF1F6"/>
                     </a:solidFill>
                   </a:tcPr>
                 </a:tc>
@@ -11446,81 +11616,71 @@
                   <a:txBody>
                     <a:bodyPr wrap="square"/>
                     <a:lstStyle/>
-                    <a:p>
-                      <a:r>
-                        <a:rPr sz="1100" b="0">
-                          <a:solidFill>
-                            <a:srgbClr val="282828"/>
-                          </a:solidFill>
-                          <a:latin typeface="Arial"/>
-                        </a:rPr>
-                        <a:t>accuracy</a:t>
-                      </a:r>
-                    </a:p>
-                  </a:txBody>
-                  <a:tcPr marL="54864" marR="54864" marT="18288" marB="18288">
-                    <a:solidFill>
-                      <a:srgbClr val="FFFFFF"/>
-                    </a:solidFill>
-                  </a:tcPr>
-                </a:tc>
-                <a:tc>
-                  <a:txBody>
-                    <a:bodyPr wrap="square"/>
-                    <a:lstStyle/>
-                    <a:p>
-                      <a:r>
-                        <a:rPr sz="1100" b="0">
-                          <a:solidFill>
-                            <a:srgbClr val="282828"/>
-                          </a:solidFill>
-                          <a:latin typeface="Arial"/>
-                        </a:rPr>
-                        <a:t>the imaging's error in reading a 30 nm working surface, piston and tilt removed</a:t>
-                      </a:r>
-                    </a:p>
-                  </a:txBody>
-                  <a:tcPr marL="54864" marR="54864" marT="18288" marB="18288">
-                    <a:solidFill>
-                      <a:srgbClr val="FFFFFF"/>
-                    </a:solidFill>
-                  </a:tcPr>
-                </a:tc>
-                <a:tc>
-                  <a:txBody>
-                    <a:bodyPr wrap="square"/>
-                    <a:lstStyle/>
-                    <a:p>
-                      <a:r>
-                        <a:rPr sz="1100" b="0">
-                          <a:solidFill>
-                            <a:srgbClr val="282828"/>
-                          </a:solidFill>
-                          <a:latin typeface="Arial"/>
-                        </a:rPr>
-                        <a:t>0.13 % (42 pm)</a:t>
-                      </a:r>
-                    </a:p>
-                  </a:txBody>
-                  <a:tcPr marL="54864" marR="54864" marT="18288" marB="18288">
-                    <a:solidFill>
-                      <a:srgbClr val="FFFFFF"/>
-                    </a:solidFill>
-                  </a:tcPr>
-                </a:tc>
-                <a:tc>
-                  <a:txBody>
-                    <a:bodyPr wrap="square"/>
-                    <a:lstStyle/>
-                    <a:p>
-                      <a:r>
-                        <a:rPr sz="1100" b="0">
-                          <a:solidFill>
-                            <a:srgbClr val="282828"/>
-                          </a:solidFill>
-                          <a:latin typeface="Arial"/>
-                        </a:rPr>
-                        <a:t>0.29 % (92 pm)</a:t>
+                    <a:p/>
+                  </a:txBody>
+                  <a:tcPr marL="54864" marR="54864" marT="18288" marB="18288">
+                    <a:solidFill>
+                      <a:srgbClr val="FFFFFF"/>
+                    </a:solidFill>
+                  </a:tcPr>
+                </a:tc>
+                <a:tc>
+                  <a:txBody>
+                    <a:bodyPr wrap="square"/>
+                    <a:lstStyle/>
+                    <a:p>
+                      <a:r>
+                        <a:rPr sz="1100" b="0">
+                          <a:solidFill>
+                            <a:srgbClr val="282828"/>
+                          </a:solidFill>
+                          <a:latin typeface="Arial"/>
+                        </a:rPr>
+                        <a:t>of which the pupil imaging, piston and tilt removed; in the top spatial band</a:t>
+                      </a:r>
+                    </a:p>
+                  </a:txBody>
+                  <a:tcPr marL="54864" marR="54864" marT="18288" marB="18288">
+                    <a:solidFill>
+                      <a:srgbClr val="FFFFFF"/>
+                    </a:solidFill>
+                  </a:tcPr>
+                </a:tc>
+                <a:tc>
+                  <a:txBody>
+                    <a:bodyPr wrap="square"/>
+                    <a:lstStyle/>
+                    <a:p>
+                      <a:r>
+                        <a:rPr sz="1100" b="0">
+                          <a:solidFill>
+                            <a:srgbClr val="282828"/>
+                          </a:solidFill>
+                          <a:latin typeface="Arial"/>
+                        </a:rPr>
+                        <a:t>0.13 % (42 pm); 0.5 %</a:t>
+                      </a:r>
+                    </a:p>
+                  </a:txBody>
+                  <a:tcPr marL="54864" marR="54864" marT="18288" marB="18288">
+                    <a:solidFill>
+                      <a:srgbClr val="FFFFFF"/>
+                    </a:solidFill>
+                  </a:tcPr>
+                </a:tc>
+                <a:tc>
+                  <a:txBody>
+                    <a:bodyPr wrap="square"/>
+                    <a:lstStyle/>
+                    <a:p>
+                      <a:r>
+                        <a:rPr sz="1100" b="0">
+                          <a:solidFill>
+                            <a:srgbClr val="282828"/>
+                          </a:solidFill>
+                          <a:latin typeface="Arial"/>
+                        </a:rPr>
+                        <a:t>0.29 % (92 pm); 0.9 %</a:t>
                       </a:r>
                     </a:p>
                   </a:txBody>
@@ -11536,7 +11696,17 @@
                   <a:txBody>
                     <a:bodyPr wrap="square"/>
                     <a:lstStyle/>
-                    <a:p/>
+                    <a:p>
+                      <a:r>
+                        <a:rPr sz="1100" b="0">
+                          <a:solidFill>
+                            <a:srgbClr val="282828"/>
+                          </a:solidFill>
+                          <a:latin typeface="Arial"/>
+                        </a:rPr>
+                        <a:t>precision</a:t>
+                      </a:r>
+                    </a:p>
                   </a:txBody>
                   <a:tcPr marL="54864" marR="54864" marT="18288" marB="18288">
                     <a:solidFill>
@@ -11556,7 +11726,7 @@
                           </a:solidFill>
                           <a:latin typeface="Arial"/>
                         </a:rPr>
-                        <a:t>the same, in the top spatial band (at the actuator Nyquist)</a:t>
+                        <a:t>one measurement, photon-limited, at 1e14 / 1e15 photons</a:t>
                       </a:r>
                     </a:p>
                   </a:txBody>
@@ -11578,7 +11748,7 @@
                           </a:solidFill>
                           <a:latin typeface="Arial"/>
                         </a:rPr>
-                        <a:t>0.5 %</a:t>
+                        <a:t>2.3 / 0.7 pm</a:t>
                       </a:r>
                     </a:p>
                   </a:txBody>
@@ -11600,7 +11770,7 @@
                           </a:solidFill>
                           <a:latin typeface="Arial"/>
                         </a:rPr>
-                        <a:t>0.9 %</a:t>
+                        <a:t>2.1 / 0.7 pm</a:t>
                       </a:r>
                     </a:p>
                   </a:txBody>
@@ -11624,73 +11794,73 @@
                           </a:solidFill>
                           <a:latin typeface="Arial"/>
                         </a:rPr>
-                        <a:t>precision</a:t>
-                      </a:r>
-                    </a:p>
-                  </a:txBody>
-                  <a:tcPr marL="54864" marR="54864" marT="18288" marB="18288">
-                    <a:solidFill>
-                      <a:srgbClr val="FFFFFF"/>
-                    </a:solidFill>
-                  </a:tcPr>
-                </a:tc>
-                <a:tc>
-                  <a:txBody>
-                    <a:bodyPr wrap="square"/>
-                    <a:lstStyle/>
-                    <a:p>
-                      <a:r>
-                        <a:rPr sz="1100" b="0">
-                          <a:solidFill>
-                            <a:srgbClr val="282828"/>
-                          </a:solidFill>
-                          <a:latin typeface="Arial"/>
-                        </a:rPr>
-                        <a:t>one measurement, photon-limited, at 1e14 / 1e15 photons</a:t>
-                      </a:r>
-                    </a:p>
-                  </a:txBody>
-                  <a:tcPr marL="54864" marR="54864" marT="18288" marB="18288">
-                    <a:solidFill>
-                      <a:srgbClr val="FFFFFF"/>
-                    </a:solidFill>
-                  </a:tcPr>
-                </a:tc>
-                <a:tc>
-                  <a:txBody>
-                    <a:bodyPr wrap="square"/>
-                    <a:lstStyle/>
-                    <a:p>
-                      <a:r>
-                        <a:rPr sz="1100" b="0">
-                          <a:solidFill>
-                            <a:srgbClr val="282828"/>
-                          </a:solidFill>
-                          <a:latin typeface="Arial"/>
-                        </a:rPr>
-                        <a:t>2.3 / 0.7 pm</a:t>
-                      </a:r>
-                    </a:p>
-                  </a:txBody>
-                  <a:tcPr marL="54864" marR="54864" marT="18288" marB="18288">
-                    <a:solidFill>
-                      <a:srgbClr val="FFFFFF"/>
-                    </a:solidFill>
-                  </a:tcPr>
-                </a:tc>
-                <a:tc>
-                  <a:txBody>
-                    <a:bodyPr wrap="square"/>
-                    <a:lstStyle/>
-                    <a:p>
-                      <a:r>
-                        <a:rPr sz="1100" b="0">
-                          <a:solidFill>
-                            <a:srgbClr val="282828"/>
-                          </a:solidFill>
-                          <a:latin typeface="Arial"/>
-                        </a:rPr>
-                        <a:t>2.1 / 0.7 pm</a:t>
+                        <a:t>repeatability</a:t>
+                      </a:r>
+                    </a:p>
+                  </a:txBody>
+                  <a:tcPr marL="54864" marR="54864" marT="18288" marB="18288">
+                    <a:solidFill>
+                      <a:srgbClr val="FFFFFF"/>
+                    </a:solidFill>
+                  </a:tcPr>
+                </a:tc>
+                <a:tc>
+                  <a:txBody>
+                    <a:bodyPr wrap="square"/>
+                    <a:lstStyle/>
+                    <a:p>
+                      <a:r>
+                        <a:rPr sz="1100" b="0">
+                          <a:solidFill>
+                            <a:srgbClr val="282828"/>
+                          </a:solidFill>
+                          <a:latin typeface="Arial"/>
+                        </a:rPr>
+                        <a:t>the same surface held in a servo, rms over 30 cycles, same photons</a:t>
+                      </a:r>
+                    </a:p>
+                  </a:txBody>
+                  <a:tcPr marL="54864" marR="54864" marT="18288" marB="18288">
+                    <a:solidFill>
+                      <a:srgbClr val="FFFFFF"/>
+                    </a:solidFill>
+                  </a:tcPr>
+                </a:tc>
+                <a:tc>
+                  <a:txBody>
+                    <a:bodyPr wrap="square"/>
+                    <a:lstStyle/>
+                    <a:p>
+                      <a:r>
+                        <a:rPr sz="1100" b="0">
+                          <a:solidFill>
+                            <a:srgbClr val="282828"/>
+                          </a:solidFill>
+                          <a:latin typeface="Arial"/>
+                        </a:rPr>
+                        <a:t>1.4 / 0.5 pm</a:t>
+                      </a:r>
+                    </a:p>
+                  </a:txBody>
+                  <a:tcPr marL="54864" marR="54864" marT="18288" marB="18288">
+                    <a:solidFill>
+                      <a:srgbClr val="FFFFFF"/>
+                    </a:solidFill>
+                  </a:tcPr>
+                </a:tc>
+                <a:tc>
+                  <a:txBody>
+                    <a:bodyPr wrap="square"/>
+                    <a:lstStyle/>
+                    <a:p>
+                      <a:r>
+                        <a:rPr sz="1100" b="0">
+                          <a:solidFill>
+                            <a:srgbClr val="282828"/>
+                          </a:solidFill>
+                          <a:latin typeface="Arial"/>
+                        </a:rPr>
+                        <a:t>1.3 / 0.4 pm</a:t>
                       </a:r>
                     </a:p>
                   </a:txBody>
@@ -11714,7 +11884,7 @@
                           </a:solidFill>
                           <a:latin typeface="Arial"/>
                         </a:rPr>
-                        <a:t>repeatability</a:t>
+                        <a:t>hold</a:t>
                       </a:r>
                     </a:p>
                   </a:txBody>
@@ -11736,7 +11906,7 @@
                           </a:solidFill>
                           <a:latin typeface="Arial"/>
                         </a:rPr>
-                        <a:t>the same surface held in a servo, rms over 30 cycles, same photons</a:t>
+                        <a:t>photons per cycle to keep the surface inside 3 pm</a:t>
                       </a:r>
                     </a:p>
                   </a:txBody>
@@ -11758,7 +11928,7 @@
                           </a:solidFill>
                           <a:latin typeface="Arial"/>
                         </a:rPr>
-                        <a:t>1.4 / 0.5 pm</a:t>
+                        <a:t>2.3e13</a:t>
                       </a:r>
                     </a:p>
                   </a:txBody>
@@ -11780,7 +11950,7 @@
                           </a:solidFill>
                           <a:latin typeface="Arial"/>
                         </a:rPr>
-                        <a:t>1.3 / 0.4 pm</a:t>
+                        <a:t>2.0e13</a:t>
                       </a:r>
                     </a:p>
                   </a:txBody>
@@ -11796,101 +11966,11 @@
                   <a:txBody>
                     <a:bodyPr wrap="square"/>
                     <a:lstStyle/>
-                    <a:p>
-                      <a:r>
-                        <a:rPr sz="1100" b="0">
-                          <a:solidFill>
-                            <a:srgbClr val="282828"/>
-                          </a:solidFill>
-                          <a:latin typeface="Arial"/>
-                        </a:rPr>
-                        <a:t>hold</a:t>
-                      </a:r>
-                    </a:p>
-                  </a:txBody>
-                  <a:tcPr marL="54864" marR="54864" marT="18288" marB="18288">
-                    <a:solidFill>
-                      <a:srgbClr val="FFFFFF"/>
-                    </a:solidFill>
-                  </a:tcPr>
-                </a:tc>
-                <a:tc>
-                  <a:txBody>
-                    <a:bodyPr wrap="square"/>
-                    <a:lstStyle/>
-                    <a:p>
-                      <a:r>
-                        <a:rPr sz="1100" b="0">
-                          <a:solidFill>
-                            <a:srgbClr val="282828"/>
-                          </a:solidFill>
-                          <a:latin typeface="Arial"/>
-                        </a:rPr>
-                        <a:t>photons per cycle to keep the surface inside 3 pm</a:t>
-                      </a:r>
-                    </a:p>
-                  </a:txBody>
-                  <a:tcPr marL="54864" marR="54864" marT="18288" marB="18288">
-                    <a:solidFill>
-                      <a:srgbClr val="FFFFFF"/>
-                    </a:solidFill>
-                  </a:tcPr>
-                </a:tc>
-                <a:tc>
-                  <a:txBody>
-                    <a:bodyPr wrap="square"/>
-                    <a:lstStyle/>
-                    <a:p>
-                      <a:r>
-                        <a:rPr sz="1100" b="0">
-                          <a:solidFill>
-                            <a:srgbClr val="282828"/>
-                          </a:solidFill>
-                          <a:latin typeface="Arial"/>
-                        </a:rPr>
-                        <a:t>2.3e13</a:t>
-                      </a:r>
-                    </a:p>
-                  </a:txBody>
-                  <a:tcPr marL="54864" marR="54864" marT="18288" marB="18288">
-                    <a:solidFill>
-                      <a:srgbClr val="FFFFFF"/>
-                    </a:solidFill>
-                  </a:tcPr>
-                </a:tc>
-                <a:tc>
-                  <a:txBody>
-                    <a:bodyPr wrap="square"/>
-                    <a:lstStyle/>
-                    <a:p>
-                      <a:r>
-                        <a:rPr sz="1100" b="0">
-                          <a:solidFill>
-                            <a:srgbClr val="282828"/>
-                          </a:solidFill>
-                          <a:latin typeface="Arial"/>
-                        </a:rPr>
-                        <a:t>2.0e13</a:t>
-                      </a:r>
-                    </a:p>
-                  </a:txBody>
-                  <a:tcPr marL="54864" marR="54864" marT="18288" marB="18288">
-                    <a:solidFill>
-                      <a:srgbClr val="FFFFFF"/>
-                    </a:solidFill>
-                  </a:tcPr>
-                </a:tc>
-              </a:tr>
-              <a:tr h="280035">
-                <a:tc>
-                  <a:txBody>
-                    <a:bodyPr wrap="square"/>
-                    <a:lstStyle/>
                     <a:p/>
                   </a:txBody>
                   <a:tcPr marL="54864" marR="54864" marT="18288" marB="18288">
                     <a:solidFill>
-                      <a:srgbClr val="ECF1F6"/>
+                      <a:srgbClr val="FFFFFF"/>
                     </a:solidFill>
                   </a:tcPr>
                 </a:tc>
@@ -11912,7 +11992,7 @@
                   </a:txBody>
                   <a:tcPr marL="54864" marR="54864" marT="18288" marB="18288">
                     <a:solidFill>
-                      <a:srgbClr val="ECF1F6"/>
+                      <a:srgbClr val="FFFFFF"/>
                     </a:solidFill>
                   </a:tcPr>
                 </a:tc>
@@ -11934,7 +12014,7 @@
                   </a:txBody>
                   <a:tcPr marL="54864" marR="54864" marT="18288" marB="18288">
                     <a:solidFill>
-                      <a:srgbClr val="ECF1F6"/>
+                      <a:srgbClr val="FFFFFF"/>
                     </a:solidFill>
                   </a:tcPr>
                 </a:tc>
@@ -11956,7 +12036,7 @@
                   </a:txBody>
                   <a:tcPr marL="54864" marR="54864" marT="18288" marB="18288">
                     <a:solidFill>
-                      <a:srgbClr val="ECF1F6"/>
+                      <a:srgbClr val="FFFFFF"/>
                     </a:solidFill>
                   </a:tcPr>
                 </a:tc>
@@ -11973,7 +12053,7 @@
         </p:nvSpPr>
         <p:spPr>
           <a:xfrm>
-            <a:off x="411480" y="3404997"/>
+            <a:off x="411480" y="4250817"/>
             <a:ext cx="11368735" cy="274320"/>
           </a:xfrm>
           <a:prstGeom prst="rect">
@@ -11993,7 +12073,7 @@
               </a:spcAft>
             </a:pPr>
             <a:r>
-              <a:rPr sz="1500" b="0">
+              <a:rPr sz="1200" b="0">
                 <a:solidFill>
                   <a:srgbClr val="282828"/>
                 </a:solidFill>
@@ -12002,7 +12082,7 @@
               <a:t>•  </a:t>
             </a:r>
             <a:r>
-              <a:rPr sz="1500" b="1">
+              <a:rPr sz="1200" b="1">
                 <a:solidFill>
                   <a:srgbClr val="282828"/>
                 </a:solidFill>
@@ -12011,7 +12091,7 @@
               <a:t>Picometer measurement is photon-limited, not bench-limited.</a:t>
             </a:r>
             <a:r>
-              <a:rPr sz="1500" b="0">
+              <a:rPr sz="1200" b="0">
                 <a:solidFill>
                   <a:srgbClr val="282828"/>
                 </a:solidFill>
@@ -12020,7 +12100,7 @@
               <a:t>  One measurement at 1e15 photons — 0.31 mJ, about 1.3 s of a 1 mW laser — repeats to 0.7 pm, and a servo fed at that rate holds under half a picometer.  Both front ends agree to within 10 %.  For scale, </a:t>
             </a:r>
             <a:r>
-              <a:rPr sz="1500" b="1">
+              <a:rPr sz="1200" b="1">
                 <a:solidFill>
                   <a:srgbClr val="282828"/>
                 </a:solidFill>
@@ -12029,7 +12109,7 @@
               <a:t>Steeves et al. (2020, Optica 7, 1267) demonstrate 1.6 pm in 4.3 s on a real interferometer</a:t>
             </a:r>
             <a:r>
-              <a:rPr sz="1500" b="0">
+              <a:rPr sz="1200" b="0">
                 <a:solidFill>
                   <a:srgbClr val="282828"/>
                 </a:solidFill>
@@ -12045,7 +12125,7 @@
               </a:spcAft>
             </a:pPr>
             <a:r>
-              <a:rPr sz="1500" b="0">
+              <a:rPr sz="1200" b="0">
                 <a:solidFill>
                   <a:srgbClr val="282828"/>
                 </a:solidFill>
@@ -12054,22 +12134,22 @@
               <a:t>•  </a:t>
             </a:r>
             <a:r>
-              <a:rPr sz="1500" b="1">
+              <a:rPr sz="1200" b="1">
                 <a:solidFill>
                   <a:srgbClr val="282828"/>
                 </a:solidFill>
                 <a:latin typeface="Arial"/>
               </a:rPr>
-              <a:t>Accuracy is systematic and proportional</a:t>
-            </a:r>
-            <a:r>
-              <a:rPr sz="1500" b="0">
+              <a:t>Accuracy is a gain: systematic and proportional to the figure read.</a:t>
+            </a:r>
+            <a:r>
+              <a:rPr sz="1200" b="0">
                 <a:solidFill>
                   <a:srgbClr val="282828"/>
                 </a:solidFill>
                 <a:latin typeface="Arial"/>
               </a:rPr>
-              <a:t> — a fraction of the figure read, so 30 nm costs tens of picometers and a 200 nm capture figure costs hundreds.  It holds because the response matrix is measured on the surface, not assumed geometric.</a:t>
+              <a:t>  Raw, the four-step reads the 30 nm surface 1.3 % low on the mirror rig (463 pm); through the matrix measured on the surface a 10 nm change reads at gain 1.004 on lenses and 0.986 on mirrors, with floors of 1.4 and 2.3 pm.  The pupil imaging is the smaller part (0.13 % / 0.29 %); the gain is the polarization snapshot's, and the matrix measured on the surface is what carries it.</a:t>
             </a:r>
           </a:p>
           <a:p>
@@ -12079,7 +12159,7 @@
               </a:spcAft>
             </a:pPr>
             <a:r>
-              <a:rPr sz="1500" b="0">
+              <a:rPr sz="1200" b="0">
                 <a:solidFill>
                   <a:srgbClr val="282828"/>
                 </a:solidFill>
@@ -12088,7 +12168,7 @@
               <a:t>•  </a:t>
             </a:r>
             <a:r>
-              <a:rPr sz="1500" b="1">
+              <a:rPr sz="1200" b="1">
                 <a:solidFill>
                   <a:srgbClr val="282828"/>
                 </a:solidFill>
@@ -12097,7 +12177,7 @@
               <a:t>One disturbance is not photon-limited:</a:t>
             </a:r>
             <a:r>
-              <a:rPr sz="1500" b="0">
+              <a:rPr sz="1200" b="0">
                 <a:solidFill>
                   <a:srgbClr val="282828"/>
                 </a:solidFill>
@@ -12116,7 +12196,7 @@
         </p:nvSpPr>
         <p:spPr>
           <a:xfrm>
-            <a:off x="457200" y="5760720"/>
+            <a:off x="457200" y="6199632"/>
             <a:ext cx="11365992" cy="274320"/>
           </a:xfrm>
           <a:prstGeom prst="rect">
@@ -12142,7 +12222,7 @@
                 </a:solidFill>
                 <a:latin typeface="Arial"/>
               </a:rPr>
-              <a:t>The table is the interferometer's, the one gauge scored on both front ends; the three sensors, scored on the mirror rig, read within 1 % and 2 pm of it on the same surface (the side-by-side slide).  A 10 nm single-actuator change, what the servo corrects, reads against truth to 1.5 pm at gain 1.001 on lenses and 1.8 pm at 0.993 on mirrors.  Run tags are on the provenance slide and on each slide that derives a number.</a:t>
+              <a:t>The table is the interferometer's, the one gauge scored on both front ends; the three sensors, scored on the mirror rig, read within 1 % and 2 pm of it on the same surface (the side-by-side slide).  The raw-map row is the station-by-station figure's number (run redo96_oapstn2); the lens rig's raw absolute map folds the phase (51 nm against the engine, backup) and is not scored, while its differential rows read as the mirror rig's.  Run tags are on the provenance slide and on each slide that derives a number.</a:t>
             </a:r>
           </a:p>
         </p:txBody>

--- a/demo_session/deck_gauges_short_baseline.pptx
+++ b/demo_session/deck_gauges_short_baseline.pptx
@@ -11337,7 +11337,7 @@
         </p:nvGraphicFramePr>
         <p:xfrm>
           <a:off x="411480" y="1298448"/>
-          <a:ext cx="11368733" cy="2806065"/>
+          <a:ext cx="11368734" cy="2994660"/>
         </p:xfrm>
         <a:graphic>
           <a:graphicData uri="http://schemas.openxmlformats.org/drawingml/2006/table">
@@ -11346,9 +11346,9 @@
                 <a:tableStyleId>{5C22544A-7EE6-4342-B048-85BDC9FD1C3A}</a:tableStyleId>
               </a:tblPr>
               <a:tblGrid>
-                <a:gridCol w="1951109"/>
-                <a:gridCol w="5642398"/>
-                <a:gridCol w="1740178"/>
+                <a:gridCol w="1875344"/>
+                <a:gridCol w="5423294"/>
+                <a:gridCol w="2035048"/>
                 <a:gridCol w="2035048"/>
               </a:tblGrid>
               <a:tr h="468630">
@@ -11578,7 +11578,7 @@
                           </a:solidFill>
                           <a:latin typeface="Arial"/>
                         </a:rPr>
-                        <a:t>not scored (a phase fold; backup)</a:t>
+                        <a:t>1.4 % (350 pm), gain 0.993</a:t>
                       </a:r>
                     </a:p>
                   </a:txBody>
@@ -11611,7 +11611,7 @@
                   </a:tcPr>
                 </a:tc>
               </a:tr>
-              <a:tr h="280035">
+              <a:tr h="468630">
                 <a:tc>
                   <a:txBody>
                     <a:bodyPr wrap="square"/>
@@ -12053,7 +12053,7 @@
         </p:nvSpPr>
         <p:spPr>
           <a:xfrm>
-            <a:off x="411480" y="4250817"/>
+            <a:off x="411480" y="4439412"/>
             <a:ext cx="11368735" cy="274320"/>
           </a:xfrm>
           <a:prstGeom prst="rect">
@@ -12149,7 +12149,7 @@
                 </a:solidFill>
                 <a:latin typeface="Arial"/>
               </a:rPr>
-              <a:t>  Raw, the four-step reads the 30 nm surface 1.3 % low on the mirror rig (463 pm); through the matrix measured on the surface a 10 nm change reads at gain 1.004 on lenses and 0.986 on mirrors, with floors of 1.4 and 2.3 pm.  The pupil imaging is the smaller part (0.13 % / 0.29 %); the gain is the polarization snapshot's, and the matrix measured on the surface is what carries it.</a:t>
+              <a:t>  Raw, the four-step reads the 30 nm surface 0.7 % low on lenses (350 pm) and 1.3 % low on mirrors (463 pm); through the matrix measured on the surface a 10 nm change reads at gain 1.004 on lenses and 0.986 on mirrors, with floors of 1.4 and 2.3 pm.  The pupil imaging is the smaller part (0.13 % / 0.29 %); the gain is the polarization snapshot's, and the matrix measured on the surface is what carries it.</a:t>
             </a:r>
           </a:p>
           <a:p>
@@ -12222,7 +12222,7 @@
                 </a:solidFill>
                 <a:latin typeface="Arial"/>
               </a:rPr>
-              <a:t>The table is the interferometer's, the one gauge scored on both front ends; the three sensors, scored on the mirror rig, read within 1 % and 2 pm of it on the same surface (the side-by-side slide).  The raw-map row is the station-by-station figure's number (run redo96_oapstn2); the lens rig's raw absolute map folds the phase (51 nm against the engine, backup) and is not scored, while its differential rows read as the mirror rig's.  Run tags are on the provenance slide and on each slide that derives a number.</a:t>
+              <a:t>The table is the interferometer's, the one gauge scored on both front ends; the three sensors, scored on the mirror rig, read within 1 % and 2 pm of it on the same surface (the side-by-side slide).  The raw-map row is the station-by-station figure's number (runs redo96_lensstn2, redo96_oapstn2), the four-step's sign set by a +50 nm push as on a real interferometer: the two rigs' polarization inputs give opposite fringe directions, which the matrix carries and an absolute map does not (the lens rig's earlier 51 nm 'fold' was the sign).  Run tags are on the provenance slide and on each slide that derives a number.</a:t>
             </a:r>
           </a:p>
         </p:txBody>
@@ -17303,7 +17303,7 @@
                 </a:solidFill>
                 <a:latin typeface="Arial"/>
               </a:rPr>
-              <a:t>Run tag redo96_oapstn2 (the mirror rig; the DM's full-lattice 30 nm command, seed 7, the same surface in every station figure).  The lens rig's figure exists but its absolute residual reads 51 nm against the engine — a fold of the phase, not an imaging error (its differential rows read the same as the mirror rig's); under investigation, so it is not shown.</a:t>
+              <a:t>Run tag redo96_oapstn2 (the mirror rig; the DM's full-lattice 30 nm command, seed 7, the same surface in every station figure).  The lens rig's figure (redo96_lensstn2) reads 350 pm at gain 0.993 once the four-step's sign is set by a +50 nm push: the two rigs' polarization inputs ('collimated' on lenses, at the source on mirrors) give opposite fringe directions with the analyzer, so the lens rig's raw map came out as the negative of the surface (the 51 nm residual of the 09-17 figure was 2 x the surface, not a fold); every differential row carries the sign in its matrix and never saw it.</a:t>
             </a:r>
           </a:p>
         </p:txBody>

--- a/demo_session/deck_gauges_short_baseline.pptx
+++ b/demo_session/deck_gauges_short_baseline.pptx
@@ -3975,7 +3975,7 @@
         <p:spPr>
           <a:xfrm>
             <a:off x="5212080" y="1060704"/>
-            <a:ext cx="6629400" cy="1225296"/>
+            <a:ext cx="6629400" cy="1124712"/>
           </a:xfrm>
           <a:prstGeom prst="rect">
             <a:avLst/>
@@ -3991,7 +3991,7 @@
         <p:spPr>
           <a:xfrm>
             <a:off x="228600" y="1170432"/>
-            <a:ext cx="3931920" cy="724408"/>
+            <a:ext cx="3931920" cy="889508"/>
           </a:xfrm>
           <a:prstGeom prst="rect">
             <a:avLst/>
@@ -4016,7 +4016,7 @@
                 </a:solidFill>
                 <a:latin typeface="Arial"/>
               </a:rPr>
-              <a:t>Interferometer (hybrid): the command; the test and reference arms at the camera; two of the four phase-stepped frames; the recovered surface, 25.8 nm rms; the raw map minus the engine's field, 463 pm, gain 0.987.</a:t>
+              <a:t>Interferometer (hybrid): the command; the test and reference arms at the camera; two of the four phase-stepped frames; the recovered surface, 25.8 nm rms; the snapshot's raw map minus the engine's field, 463 pm, gain 0.987; the piezo four-step's, 0.01 pm, gain 1.0000.</a:t>
             </a:r>
           </a:p>
         </p:txBody>
@@ -4037,7 +4037,7 @@
         </p:blipFill>
         <p:spPr>
           <a:xfrm>
-            <a:off x="5212080" y="2340864"/>
+            <a:off x="5212080" y="2240280"/>
             <a:ext cx="6629400" cy="1161288"/>
           </a:xfrm>
           <a:prstGeom prst="rect">
@@ -4053,7 +4053,7 @@
         </p:nvSpPr>
         <p:spPr>
           <a:xfrm>
-            <a:off x="228600" y="2450592"/>
+            <a:off x="228600" y="2350008"/>
             <a:ext cx="3931920" cy="889508"/>
           </a:xfrm>
           <a:prstGeom prst="rect">
@@ -4100,7 +4100,7 @@
         </p:blipFill>
         <p:spPr>
           <a:xfrm>
-            <a:off x="5212080" y="3557016"/>
+            <a:off x="5212080" y="3456432"/>
             <a:ext cx="6629400" cy="1143000"/>
           </a:xfrm>
           <a:prstGeom prst="rect">
@@ -4116,7 +4116,7 @@
         </p:nvSpPr>
         <p:spPr>
           <a:xfrm>
-            <a:off x="182880" y="3666744"/>
+            <a:off x="182880" y="3566160"/>
             <a:ext cx="3977639" cy="724408"/>
           </a:xfrm>
           <a:prstGeom prst="rect">
@@ -4163,7 +4163,7 @@
         </p:blipFill>
         <p:spPr>
           <a:xfrm>
-            <a:off x="5212080" y="4754880"/>
+            <a:off x="5212080" y="4654296"/>
             <a:ext cx="6629400" cy="1143000"/>
           </a:xfrm>
           <a:prstGeom prst="rect">
@@ -4179,7 +4179,7 @@
         </p:nvSpPr>
         <p:spPr>
           <a:xfrm>
-            <a:off x="182880" y="4864608"/>
+            <a:off x="182880" y="4764024"/>
             <a:ext cx="3977639" cy="724408"/>
           </a:xfrm>
           <a:prstGeom prst="rect">
@@ -4218,7 +4218,7 @@
         </p:nvSpPr>
         <p:spPr>
           <a:xfrm>
-            <a:off x="411480" y="5998464"/>
+            <a:off x="411480" y="5897880"/>
             <a:ext cx="11384280" cy="274320"/>
           </a:xfrm>
           <a:prstGeom prst="rect">
@@ -4275,7 +4275,7 @@
         </p:nvSpPr>
         <p:spPr>
           <a:xfrm>
-            <a:off x="411480" y="6455664"/>
+            <a:off x="411480" y="6355080"/>
             <a:ext cx="11384280" cy="274320"/>
           </a:xfrm>
           <a:prstGeom prst="rect">
@@ -11337,7 +11337,7 @@
         </p:nvGraphicFramePr>
         <p:xfrm>
           <a:off x="411480" y="1298448"/>
-          <a:ext cx="11368734" cy="2994660"/>
+          <a:ext cx="11368733" cy="2806065"/>
         </p:xfrm>
         <a:graphic>
           <a:graphicData uri="http://schemas.openxmlformats.org/drawingml/2006/table">
@@ -11346,10 +11346,10 @@
                 <a:tableStyleId>{5C22544A-7EE6-4342-B048-85BDC9FD1C3A}</a:tableStyleId>
               </a:tblPr>
               <a:tblGrid>
-                <a:gridCol w="1875344"/>
-                <a:gridCol w="5423294"/>
-                <a:gridCol w="2035048"/>
-                <a:gridCol w="2035048"/>
+                <a:gridCol w="1450493"/>
+                <a:gridCol w="6076392"/>
+                <a:gridCol w="1920924"/>
+                <a:gridCol w="1920924"/>
               </a:tblGrid>
               <a:tr h="468630">
                 <a:tc>
@@ -11556,7 +11556,7 @@
                           </a:solidFill>
                           <a:latin typeface="Arial"/>
                         </a:rPr>
-                        <a:t>the raw map of the 30 nm surface against the engine's field at the camera, before any calibration</a:t>
+                        <a:t>the raw map of the 30 nm surface against the engine's field at the camera, before any calibration: the polarization snapshot / the hybrid's piezo four-step</a:t>
                       </a:r>
                     </a:p>
                   </a:txBody>
@@ -11578,7 +11578,7 @@
                           </a:solidFill>
                           <a:latin typeface="Arial"/>
                         </a:rPr>
-                        <a:t>1.4 % (350 pm), gain 0.993</a:t>
+                        <a:t>1.4 % (350 pm), gain 0.993 / 0.01 pm, gain 1.0000</a:t>
                       </a:r>
                     </a:p>
                   </a:txBody>
@@ -11600,7 +11600,7 @@
                           </a:solidFill>
                           <a:latin typeface="Arial"/>
                         </a:rPr>
-                        <a:t>1.5 % (463 pm), gain 0.987</a:t>
+                        <a:t>1.5 % (463 pm), gain 0.987 / 0.01 pm, gain 1.0000</a:t>
                       </a:r>
                     </a:p>
                   </a:txBody>
@@ -11611,7 +11611,7 @@
                   </a:tcPr>
                 </a:tc>
               </a:tr>
-              <a:tr h="468630">
+              <a:tr h="280035">
                 <a:tc>
                   <a:txBody>
                     <a:bodyPr wrap="square"/>
@@ -12053,7 +12053,7 @@
         </p:nvSpPr>
         <p:spPr>
           <a:xfrm>
-            <a:off x="411480" y="4439412"/>
+            <a:off x="411480" y="4250817"/>
             <a:ext cx="11368735" cy="274320"/>
           </a:xfrm>
           <a:prstGeom prst="rect">
@@ -12073,7 +12073,7 @@
               </a:spcAft>
             </a:pPr>
             <a:r>
-              <a:rPr sz="1200" b="0">
+              <a:rPr sz="1100" b="0">
                 <a:solidFill>
                   <a:srgbClr val="282828"/>
                 </a:solidFill>
@@ -12082,7 +12082,7 @@
               <a:t>•  </a:t>
             </a:r>
             <a:r>
-              <a:rPr sz="1200" b="1">
+              <a:rPr sz="1100" b="1">
                 <a:solidFill>
                   <a:srgbClr val="282828"/>
                 </a:solidFill>
@@ -12091,16 +12091,16 @@
               <a:t>Picometer measurement is photon-limited, not bench-limited.</a:t>
             </a:r>
             <a:r>
-              <a:rPr sz="1200" b="0">
+              <a:rPr sz="1100" b="0">
                 <a:solidFill>
                   <a:srgbClr val="282828"/>
                 </a:solidFill>
                 <a:latin typeface="Arial"/>
               </a:rPr>
-              <a:t>  One measurement at 1e15 photons — 0.31 mJ, about 1.3 s of a 1 mW laser — repeats to 0.7 pm, and a servo fed at that rate holds under half a picometer.  Both front ends agree to within 10 %.  For scale, </a:t>
-            </a:r>
-            <a:r>
-              <a:rPr sz="1200" b="1">
+              <a:t>  One measurement at 1e15 photons — 0.31 mJ, 1.3 s of a 1 mW laser — repeats to 0.7 pm, and a servo fed at that rate holds under half a picometer; both front ends agree within 10 %.  For scale, </a:t>
+            </a:r>
+            <a:r>
+              <a:rPr sz="1100" b="1">
                 <a:solidFill>
                   <a:srgbClr val="282828"/>
                 </a:solidFill>
@@ -12109,13 +12109,13 @@
               <a:t>Steeves et al. (2020, Optica 7, 1267) demonstrate 1.6 pm in 4.3 s on a real interferometer</a:t>
             </a:r>
             <a:r>
-              <a:rPr sz="1200" b="0">
+              <a:rPr sz="1100" b="0">
                 <a:solidFill>
                   <a:srgbClr val="282828"/>
                 </a:solidFill>
                 <a:latin typeface="Arial"/>
               </a:rPr>
-              <a:t>: ours is photon-limited only, carrying no vibration, thermal drift or detector systematics, so it is the floor this design allows rather than a prediction of the built bench — and agreeing within a factor of two is the check that the model is in the right regime.</a:t>
+              <a:t>: ours is photon-limited only (no vibration, thermal drift or detector systematics), the floor this design allows rather than a prediction of the built bench; agreeing within a factor of two says the model is in the right regime.</a:t>
             </a:r>
           </a:p>
           <a:p>
@@ -12125,7 +12125,7 @@
               </a:spcAft>
             </a:pPr>
             <a:r>
-              <a:rPr sz="1200" b="0">
+              <a:rPr sz="1100" b="0">
                 <a:solidFill>
                   <a:srgbClr val="282828"/>
                 </a:solidFill>
@@ -12134,7 +12134,7 @@
               <a:t>•  </a:t>
             </a:r>
             <a:r>
-              <a:rPr sz="1200" b="1">
+              <a:rPr sz="1100" b="1">
                 <a:solidFill>
                   <a:srgbClr val="282828"/>
                 </a:solidFill>
@@ -12143,13 +12143,13 @@
               <a:t>Accuracy is a gain: systematic and proportional to the figure read.</a:t>
             </a:r>
             <a:r>
-              <a:rPr sz="1200" b="0">
+              <a:rPr sz="1100" b="0">
                 <a:solidFill>
                   <a:srgbClr val="282828"/>
                 </a:solidFill>
                 <a:latin typeface="Arial"/>
               </a:rPr>
-              <a:t>  Raw, the four-step reads the 30 nm surface 0.7 % low on lenses (350 pm) and 1.3 % low on mirrors (463 pm); through the matrix measured on the surface a 10 nm change reads at gain 1.004 on lenses and 0.986 on mirrors, with floors of 1.4 and 2.3 pm.  The pupil imaging is the smaller part (0.13 % / 0.29 %); the gain is the polarization snapshot's, and the matrix measured on the surface is what carries it.</a:t>
+              <a:t>  Raw, the four-step reads the 30 nm surface 0.7 % low on lenses (350 pm) and 1.3 % low on mirrors (463 pm); through the matrix measured on the surface a 10 nm change reads at gain 1.004 on lenses and 0.986 on mirrors, with floors of 1.4 and 2.3 pm.  The gain is the polarization snapshot's -- the hybrid's piezo four-step reads the same surface at gain 1.0000 against the engine, which is what its absolute-calibration leg is for -- and the matrix measured on the surface carries it; the pupil imaging is the smaller part (0.13 % / 0.29 %).</a:t>
             </a:r>
           </a:p>
           <a:p>
@@ -12159,7 +12159,7 @@
               </a:spcAft>
             </a:pPr>
             <a:r>
-              <a:rPr sz="1200" b="0">
+              <a:rPr sz="1100" b="0">
                 <a:solidFill>
                   <a:srgbClr val="282828"/>
                 </a:solidFill>
@@ -12168,7 +12168,7 @@
               <a:t>•  </a:t>
             </a:r>
             <a:r>
-              <a:rPr sz="1200" b="1">
+              <a:rPr sz="1100" b="1">
                 <a:solidFill>
                   <a:srgbClr val="282828"/>
                 </a:solidFill>
@@ -12177,7 +12177,7 @@
               <a:t>One disturbance is not photon-limited:</a:t>
             </a:r>
             <a:r>
-              <a:rPr sz="1200" b="0">
+              <a:rPr sz="1100" b="0">
                 <a:solidFill>
                   <a:srgbClr val="282828"/>
                 </a:solidFill>
@@ -12196,7 +12196,7 @@
         </p:nvSpPr>
         <p:spPr>
           <a:xfrm>
-            <a:off x="457200" y="6199632"/>
+            <a:off x="457200" y="6327648"/>
             <a:ext cx="11365992" cy="274320"/>
           </a:xfrm>
           <a:prstGeom prst="rect">
@@ -12222,7 +12222,7 @@
                 </a:solidFill>
                 <a:latin typeface="Arial"/>
               </a:rPr>
-              <a:t>The table is the interferometer's, the one gauge scored on both front ends; the three sensors, scored on the mirror rig, read within 1 % and 2 pm of it on the same surface (the side-by-side slide).  The raw-map row is the station-by-station figure's number (runs redo96_lensstn2, redo96_oapstn2), the four-step's sign set by a +50 nm push as on a real interferometer: the two rigs' polarization inputs give opposite fringe directions, which the matrix carries and an absolute map does not (the lens rig's earlier 51 nm 'fold' was the sign).  Run tags are on the provenance slide and on each slide that derives a number.</a:t>
+              <a:t>The table is the interferometer's, the one gauge scored on both front ends; the three sensors, scored on the mirror rig, read within 1 % and 2 pm of it (the side-by-side slide).  The raw-map rows are the station figures' (runs redo96_lensstn2, redo96_oapstn2), the snapshot's sign set by a +50 nm push: the two rigs' polarization inputs run the fringe opposite ways, which the matrix carries and an absolute map does not.  Run tags are on the provenance slide and on each slide that derives a number.</a:t>
             </a:r>
           </a:p>
         </p:txBody>
@@ -17165,8 +17165,8 @@
         </p:blipFill>
         <p:spPr>
           <a:xfrm>
-            <a:off x="1713761" y="1298448"/>
-            <a:ext cx="8764172" cy="2531872"/>
+            <a:off x="1226862" y="1298448"/>
+            <a:ext cx="9737969" cy="2531872"/>
           </a:xfrm>
           <a:prstGeom prst="rect">
             <a:avLst/>
@@ -17303,7 +17303,7 @@
                 </a:solidFill>
                 <a:latin typeface="Arial"/>
               </a:rPr>
-              <a:t>Run tag redo96_oapstn2 (the mirror rig; the DM's full-lattice 30 nm command, seed 7, the same surface in every station figure).  The lens rig's figure (redo96_lensstn2) reads 350 pm at gain 0.993 once the four-step's sign is set by a +50 nm push: the two rigs' polarization inputs ('collimated' on lenses, at the source on mirrors) give opposite fringe directions with the analyzer, so the lens rig's raw map came out as the negative of the surface (the 51 nm residual of the 09-17 figure was 2 x the surface, not a fold); every differential row carries the sign in its matrix and never saw it.</a:t>
+              <a:t>Run tag redo96_oapstn2 (the mirror rig; the DM's full-lattice 30 nm command, seed 7, the same surface in every station figure).  The lens rig's figure (redo96_lensstn2) reads 350 pm at gain 0.993 once the four-step's sign is set by a +50 nm push: the two rigs' polarization inputs ('collimated' on lenses, at the source on mirrors) give opposite fringe directions with the analyzer, so the lens rig's raw map came out as the negative of the surface (the 51 nm residual of the 09-17 figure was 2 x the surface, not a fold); every differential row carries the sign in its matrix and never saw it.  The eighth column is the hybrid's piezo four-step on the same frames' fields: 0.01 pm, gain 1.0000 on both rigs -- the snapshot's gain is a polarization term and the piezo leg is its calibration.</a:t>
             </a:r>
           </a:p>
         </p:txBody>
@@ -36048,7 +36048,7 @@
                 </a:solidFill>
                 <a:latin typeface="Arial"/>
               </a:rPr>
-              <a:t> the test beam from the mirror interferes with the flat's beam; four frames at four phase steps give the phase at every pixel.  The snapshot form takes the four frames at once through polarization optics (no drift within a scan); the piezo form steps the flat in time (no polarization systematics).  Each removes the other's error.</a:t>
+              <a:t> the test beam from the mirror interferes with the flat's beam; four frames at four phase steps give the phase at every pixel.  The snapshot form takes the four frames at once through polarization optics (no drift within a scan); the piezo form steps the flat in time (no polarization systematics).  Each removes the other's error, measured: on the 30 nm surface the snapshot's raw map reads the engine's field at gain 0.993 (lenses) / 0.987 (mirrors), the piezo four-step at gain 1.0000, 0.01 pm (station figures) -- the piezo leg sets the snapshot's gain, the snapshot then reads every change without drift.</a:t>
             </a:r>
           </a:p>
           <a:p>
